--- a/docs/Backup_Generator_Project.pptx
+++ b/docs/Backup_Generator_Project.pptx
@@ -18509,7 +18509,7 @@
         </p:blipFill>
         <p:spPr>
           <a:xfrm>
-            <a:off x="7074124" y="140246"/>
+            <a:off x="7074124" y="452317"/>
             <a:ext cx="4272749" cy="5179089"/>
           </a:xfrm>
           <a:prstGeom prst="rect">
@@ -18539,7 +18539,7 @@
         </p:blipFill>
         <p:spPr>
           <a:xfrm>
-            <a:off x="7311047" y="5292344"/>
+            <a:off x="7311047" y="5604415"/>
             <a:ext cx="4035826" cy="479973"/>
           </a:xfrm>
           <a:prstGeom prst="rect">
